--- a/videos/machine-learning/03_ridger_regression_gradient_descent/recreated_pptx/slide_036_recreated.pptx
+++ b/videos/machine-learning/03_ridger_regression_gradient_descent/recreated_pptx/slide_036_recreated.pptx
@@ -852,7 +852,7 @@
 </file>
 
 <file path=ppt/slides/slide1.xml><?xml version="1.0" encoding="utf-8"?>
-<p:sld xmlns:a="http://schemas.openxmlformats.org/drawingml/2006/main" xmlns:r="http://schemas.openxmlformats.org/officeDocument/2006/relationships" xmlns:p="http://schemas.openxmlformats.org/presentationml/2006/main">
+<p:sld xmlns:mc="http://schemas.openxmlformats.org/markup-compatibility/2006" xmlns:a="http://schemas.openxmlformats.org/drawingml/2006/main" xmlns:r="http://schemas.openxmlformats.org/officeDocument/2006/relationships" xmlns:p="http://schemas.openxmlformats.org/presentationml/2006/main">
   <p:cSld name="Slide 1">
     <p:bg>
       <p:bgPr>
@@ -2467,30 +2467,265 @@
           </a:p>
         </p:txBody>
       </p:sp>
-      <p:pic>
-        <p:nvPicPr>
-          <p:cNvPr id="20" name="Image 0" descr="videos/machine-learning/03_ridger_regression_gradient_descent/recreated_pptx/build/assets/eq_036_error.png">    </p:cNvPr>
-          <p:cNvPicPr>
-            <a:picLocks noChangeAspect="1"/>
-          </p:cNvPicPr>
-          <p:nvPr/>
-        </p:nvPicPr>
-        <p:blipFill>
-          <a:blip r:embed="rId1"/>
-          <a:stretch>
-            <a:fillRect/>
-          </a:stretch>
-        </p:blipFill>
-        <p:spPr>
-          <a:xfrm>
-            <a:off x="1066800" y="4681220"/>
-            <a:ext cx="8243316" cy="574545"/>
-          </a:xfrm>
-          <a:prstGeom prst="rect">
-            <a:avLst/>
-          </a:prstGeom>
-        </p:spPr>
-      </p:pic>
+      <mc:AlternateContent>
+        <mc:Choice xmlns:a14="http://schemas.microsoft.com/office/drawing/2010/main" Requires="a14">
+          <p:sp>
+            <p:nvSpPr>
+              <p:cNvPr id="20" name="Equation OMML" descr="Error = \sum_{all misclassified vectors(i)} W^T X_i \Rightarrow (W^T X_i) take positive and negative values"/>
+              <p:cNvSpPr txBox="1"/>
+              <p:nvPr/>
+            </p:nvSpPr>
+            <p:spPr>
+              <a:xfrm>
+                <a:off x="1066800" y="4681220"/>
+                <a:ext cx="8243316" cy="574545"/>
+              </a:xfrm>
+              <a:prstGeom prst="rect">
+                <a:avLst/>
+              </a:prstGeom>
+              <a:noFill/>
+            </p:spPr>
+            <p:txBody>
+              <a:bodyPr lIns="0" tIns="0" rIns="0" bIns="0" anchor="ctr">
+                <a:noAutofit/>
+              </a:bodyPr>
+              <a:lstStyle/>
+              <a:p>
+                <a:pPr algn="ctr">
+                  <a:buNone/>
+                </a:pPr>
+                <a14:m>
+                  <m:oMathPara xmlns:m="http://schemas.openxmlformats.org/officeDocument/2006/math" xmlns:a="http://schemas.openxmlformats.org/drawingml/2006/main">
+                    <m:oMathParaPr>
+                      <m:jc m:val="centerGroup"/>
+                    </m:oMathParaPr>
+                    <m:oMath xmlns:m="http://schemas.openxmlformats.org/officeDocument/2006/math">
+                      <m:r>
+                        <a:rPr lang="en-US" i="1" smtClean="0" sz="2100">
+                          <a:solidFill>
+                            <a:srgbClr val="000000"/>
+                          </a:solidFill>
+                          <a:latin typeface="Cambria Math" panose="02040503050406030204" pitchFamily="18" charset="0"/>
+                        </a:rPr>
+                        <m:t xml:space="preserve">Error=</m:t>
+                      </m:r>
+                      <m:nary>
+                        <m:naryPr>
+                          <m:chr m:val="∑"/>
+                          <m:limLoc m:val="undOvr"/>
+                          <m:ctrlPr>
+                            <a:rPr lang="en-US" i="1" smtClean="0" sz="2100">
+                              <a:solidFill>
+                                <a:srgbClr val="000000"/>
+                              </a:solidFill>
+                              <a:latin typeface="Cambria Math" panose="02040503050406030204" pitchFamily="18" charset="0"/>
+                            </a:rPr>
+                          </m:ctrlPr>
+                        </m:naryPr>
+                        <m:sub>
+                          <m:r>
+                            <a:rPr lang="en-US" i="1" smtClean="0" sz="2100">
+                              <a:solidFill>
+                                <a:srgbClr val="000000"/>
+                              </a:solidFill>
+                              <a:latin typeface="Cambria Math" panose="02040503050406030204" pitchFamily="18" charset="0"/>
+                            </a:rPr>
+                            <m:t xml:space="preserve">allmisclassifiedvectors(i)</m:t>
+                          </m:r>
+                        </m:sub>
+                        <m:sup/>
+                        <m:e>
+                          <m:sSup>
+                            <m:sSupPr>
+                              <m:ctrlPr>
+                                <a:rPr lang="en-US" i="1" smtClean="0" sz="2100">
+                                  <a:solidFill>
+                                    <a:srgbClr val="000000"/>
+                                  </a:solidFill>
+                                  <a:latin typeface="Cambria Math" panose="02040503050406030204" pitchFamily="18" charset="0"/>
+                                </a:rPr>
+                              </m:ctrlPr>
+                            </m:sSupPr>
+                            <m:e>
+                              <m:r>
+                                <a:rPr lang="en-US" i="1" smtClean="0" sz="2100">
+                                  <a:solidFill>
+                                    <a:srgbClr val="000000"/>
+                                  </a:solidFill>
+                                  <a:latin typeface="Cambria Math" panose="02040503050406030204" pitchFamily="18" charset="0"/>
+                                </a:rPr>
+                                <m:t xml:space="preserve">W</m:t>
+                              </m:r>
+                            </m:e>
+                            <m:sup>
+                              <m:r>
+                                <a:rPr lang="en-US" i="1" smtClean="0" sz="2100">
+                                  <a:solidFill>
+                                    <a:srgbClr val="000000"/>
+                                  </a:solidFill>
+                                  <a:latin typeface="Cambria Math" panose="02040503050406030204" pitchFamily="18" charset="0"/>
+                                </a:rPr>
+                                <m:t xml:space="preserve">T</m:t>
+                              </m:r>
+                            </m:sup>
+                          </m:sSup>
+                          <m:sSub>
+                            <m:sSubPr>
+                              <m:ctrlPr>
+                                <a:rPr lang="en-US" i="1" smtClean="0" sz="2100">
+                                  <a:solidFill>
+                                    <a:srgbClr val="000000"/>
+                                  </a:solidFill>
+                                  <a:latin typeface="Cambria Math" panose="02040503050406030204" pitchFamily="18" charset="0"/>
+                                </a:rPr>
+                              </m:ctrlPr>
+                            </m:sSubPr>
+                            <m:e>
+                              <m:r>
+                                <a:rPr lang="en-US" i="1" smtClean="0" sz="2100">
+                                  <a:solidFill>
+                                    <a:srgbClr val="000000"/>
+                                  </a:solidFill>
+                                  <a:latin typeface="Cambria Math" panose="02040503050406030204" pitchFamily="18" charset="0"/>
+                                </a:rPr>
+                                <m:t xml:space="preserve">X</m:t>
+                              </m:r>
+                            </m:e>
+                            <m:sub>
+                              <m:r>
+                                <a:rPr lang="en-US" i="1" smtClean="0" sz="2100">
+                                  <a:solidFill>
+                                    <a:srgbClr val="000000"/>
+                                  </a:solidFill>
+                                  <a:latin typeface="Cambria Math" panose="02040503050406030204" pitchFamily="18" charset="0"/>
+                                </a:rPr>
+                                <m:t xml:space="preserve">i</m:t>
+                              </m:r>
+                            </m:sub>
+                          </m:sSub>
+                          <m:r>
+                            <a:rPr lang="en-US" i="1" smtClean="0" sz="2100">
+                              <a:solidFill>
+                                <a:srgbClr val="000000"/>
+                              </a:solidFill>
+                              <a:latin typeface="Cambria Math" panose="02040503050406030204" pitchFamily="18" charset="0"/>
+                            </a:rPr>
+                            <m:t xml:space="preserve">⇒(</m:t>
+                          </m:r>
+                          <m:sSup>
+                            <m:sSupPr>
+                              <m:ctrlPr>
+                                <a:rPr lang="en-US" i="1" smtClean="0" sz="2100">
+                                  <a:solidFill>
+                                    <a:srgbClr val="000000"/>
+                                  </a:solidFill>
+                                  <a:latin typeface="Cambria Math" panose="02040503050406030204" pitchFamily="18" charset="0"/>
+                                </a:rPr>
+                              </m:ctrlPr>
+                            </m:sSupPr>
+                            <m:e>
+                              <m:r>
+                                <a:rPr lang="en-US" i="1" smtClean="0" sz="2100">
+                                  <a:solidFill>
+                                    <a:srgbClr val="000000"/>
+                                  </a:solidFill>
+                                  <a:latin typeface="Cambria Math" panose="02040503050406030204" pitchFamily="18" charset="0"/>
+                                </a:rPr>
+                                <m:t xml:space="preserve">W</m:t>
+                              </m:r>
+                            </m:e>
+                            <m:sup>
+                              <m:r>
+                                <a:rPr lang="en-US" i="1" smtClean="0" sz="2100">
+                                  <a:solidFill>
+                                    <a:srgbClr val="000000"/>
+                                  </a:solidFill>
+                                  <a:latin typeface="Cambria Math" panose="02040503050406030204" pitchFamily="18" charset="0"/>
+                                </a:rPr>
+                                <m:t xml:space="preserve">T</m:t>
+                              </m:r>
+                            </m:sup>
+                          </m:sSup>
+                          <m:sSub>
+                            <m:sSubPr>
+                              <m:ctrlPr>
+                                <a:rPr lang="en-US" i="1" smtClean="0" sz="2100">
+                                  <a:solidFill>
+                                    <a:srgbClr val="000000"/>
+                                  </a:solidFill>
+                                  <a:latin typeface="Cambria Math" panose="02040503050406030204" pitchFamily="18" charset="0"/>
+                                </a:rPr>
+                              </m:ctrlPr>
+                            </m:sSubPr>
+                            <m:e>
+                              <m:r>
+                                <a:rPr lang="en-US" i="1" smtClean="0" sz="2100">
+                                  <a:solidFill>
+                                    <a:srgbClr val="000000"/>
+                                  </a:solidFill>
+                                  <a:latin typeface="Cambria Math" panose="02040503050406030204" pitchFamily="18" charset="0"/>
+                                </a:rPr>
+                                <m:t xml:space="preserve">X</m:t>
+                              </m:r>
+                            </m:e>
+                            <m:sub>
+                              <m:r>
+                                <a:rPr lang="en-US" i="1" smtClean="0" sz="2100">
+                                  <a:solidFill>
+                                    <a:srgbClr val="000000"/>
+                                  </a:solidFill>
+                                  <a:latin typeface="Cambria Math" panose="02040503050406030204" pitchFamily="18" charset="0"/>
+                                </a:rPr>
+                                <m:t xml:space="preserve">i</m:t>
+                              </m:r>
+                            </m:sub>
+                          </m:sSub>
+                          <m:r>
+                            <a:rPr lang="en-US" i="1" smtClean="0" sz="2100">
+                              <a:solidFill>
+                                <a:srgbClr val="000000"/>
+                              </a:solidFill>
+                              <a:latin typeface="Cambria Math" panose="02040503050406030204" pitchFamily="18" charset="0"/>
+                            </a:rPr>
+                            <m:t xml:space="preserve">)takepositiveandnegativevalues</m:t>
+                          </m:r>
+                        </m:e>
+                      </m:nary>
+                    </m:oMath>
+                  </m:oMathPara>
+                </a14:m>
+                <a:endParaRPr lang="en-US" dirty="0"/>
+              </a:p>
+            </p:txBody>
+          </p:sp>
+        </mc:Choice>
+        <mc:Fallback>
+          <p:pic>
+            <p:nvPicPr>
+              <p:cNvPr id="20" name="Image 0" descr="videos/machine-learning/03_ridger_regression_gradient_descent/recreated_pptx/build/assets/eq_036_error.png">    </p:cNvPr>
+              <p:cNvPicPr>
+                <a:picLocks noChangeAspect="1"/>
+              </p:cNvPicPr>
+              <p:nvPr/>
+            </p:nvPicPr>
+            <p:blipFill>
+              <a:blip r:embed="rId1"/>
+              <a:stretch>
+                <a:fillRect/>
+              </a:stretch>
+            </p:blipFill>
+            <p:spPr>
+              <a:xfrm>
+                <a:off x="1066800" y="4681220"/>
+                <a:ext cx="8243316" cy="574545"/>
+              </a:xfrm>
+              <a:prstGeom prst="rect">
+                <a:avLst/>
+              </a:prstGeom>
+            </p:spPr>
+          </p:pic>
+        </mc:Fallback>
+      </mc:AlternateContent>
       <p:sp>
         <p:nvSpPr>
           <p:cNvPr id="21" name="Text 18"/>
